--- a/EsercizioLez2.pptx
+++ b/EsercizioLez2.pptx
@@ -124,8 +124,8 @@
 <pc:chgInfo xmlns:a="http://schemas.openxmlformats.org/drawingml/2006/main" xmlns:r="http://schemas.openxmlformats.org/officeDocument/2006/relationships" xmlns:ac="http://schemas.microsoft.com/office/drawing/2013/main/command" xmlns:pc="http://schemas.microsoft.com/office/powerpoint/2013/main/command">
   <pc:docChgLst>
     <pc:chgData name="Alessandro Di Piazza" userId="242384fd-1746-4b70-8d90-c83f4330e5ed" providerId="ADAL" clId="{FFF1DA74-BEAE-470B-8D8A-B7A1F3E1BF85}"/>
-    <pc:docChg chg="undo custSel addSld modSld">
-      <pc:chgData name="Alessandro Di Piazza" userId="242384fd-1746-4b70-8d90-c83f4330e5ed" providerId="ADAL" clId="{FFF1DA74-BEAE-470B-8D8A-B7A1F3E1BF85}" dt="2026-05-28T17:28:51.594" v="668" actId="5793"/>
+    <pc:docChg chg="undo custSel addSld delSld modSld">
+      <pc:chgData name="Alessandro Di Piazza" userId="242384fd-1746-4b70-8d90-c83f4330e5ed" providerId="ADAL" clId="{FFF1DA74-BEAE-470B-8D8A-B7A1F3E1BF85}" dt="2026-05-29T14:02:11.900" v="714" actId="2696"/>
       <pc:docMkLst>
         <pc:docMk/>
       </pc:docMkLst>
@@ -245,7 +245,7 @@
         </pc:spChg>
       </pc:sldChg>
       <pc:sldChg chg="modSp new mod">
-        <pc:chgData name="Alessandro Di Piazza" userId="242384fd-1746-4b70-8d90-c83f4330e5ed" providerId="ADAL" clId="{FFF1DA74-BEAE-470B-8D8A-B7A1F3E1BF85}" dt="2026-05-28T17:28:02.648" v="648" actId="5793"/>
+        <pc:chgData name="Alessandro Di Piazza" userId="242384fd-1746-4b70-8d90-c83f4330e5ed" providerId="ADAL" clId="{FFF1DA74-BEAE-470B-8D8A-B7A1F3E1BF85}" dt="2026-05-29T12:18:13.776" v="669" actId="1076"/>
         <pc:sldMkLst>
           <pc:docMk/>
           <pc:sldMk cId="593474178" sldId="261"/>
@@ -259,7 +259,7 @@
           </ac:spMkLst>
         </pc:spChg>
         <pc:spChg chg="mod">
-          <ac:chgData name="Alessandro Di Piazza" userId="242384fd-1746-4b70-8d90-c83f4330e5ed" providerId="ADAL" clId="{FFF1DA74-BEAE-470B-8D8A-B7A1F3E1BF85}" dt="2026-05-28T17:28:02.648" v="648" actId="5793"/>
+          <ac:chgData name="Alessandro Di Piazza" userId="242384fd-1746-4b70-8d90-c83f4330e5ed" providerId="ADAL" clId="{FFF1DA74-BEAE-470B-8D8A-B7A1F3E1BF85}" dt="2026-05-29T12:18:13.776" v="669" actId="1076"/>
           <ac:spMkLst>
             <pc:docMk/>
             <pc:sldMk cId="593474178" sldId="261"/>
@@ -287,6 +287,29 @@
             <pc:docMk/>
             <pc:sldMk cId="3191494456" sldId="262"/>
             <ac:spMk id="3" creationId="{D213E183-1DED-7BEB-AAB2-E7E94F8F4F69}"/>
+          </ac:spMkLst>
+        </pc:spChg>
+      </pc:sldChg>
+      <pc:sldChg chg="modSp new del mod">
+        <pc:chgData name="Alessandro Di Piazza" userId="242384fd-1746-4b70-8d90-c83f4330e5ed" providerId="ADAL" clId="{FFF1DA74-BEAE-470B-8D8A-B7A1F3E1BF85}" dt="2026-05-29T14:02:11.900" v="714" actId="2696"/>
+        <pc:sldMkLst>
+          <pc:docMk/>
+          <pc:sldMk cId="554109984" sldId="265"/>
+        </pc:sldMkLst>
+        <pc:spChg chg="mod">
+          <ac:chgData name="Alessandro Di Piazza" userId="242384fd-1746-4b70-8d90-c83f4330e5ed" providerId="ADAL" clId="{FFF1DA74-BEAE-470B-8D8A-B7A1F3E1BF85}" dt="2026-05-29T13:46:35.042" v="679" actId="20577"/>
+          <ac:spMkLst>
+            <pc:docMk/>
+            <pc:sldMk cId="554109984" sldId="265"/>
+            <ac:spMk id="2" creationId="{8A33C7C4-9B7B-9817-D937-95B7966E50DE}"/>
+          </ac:spMkLst>
+        </pc:spChg>
+        <pc:spChg chg="mod">
+          <ac:chgData name="Alessandro Di Piazza" userId="242384fd-1746-4b70-8d90-c83f4330e5ed" providerId="ADAL" clId="{FFF1DA74-BEAE-470B-8D8A-B7A1F3E1BF85}" dt="2026-05-29T13:46:40.698" v="713" actId="20577"/>
+          <ac:spMkLst>
+            <pc:docMk/>
+            <pc:sldMk cId="554109984" sldId="265"/>
+            <ac:spMk id="3" creationId="{F69C4AE2-7878-6BE9-E402-DA13B25C287E}"/>
           </ac:spMkLst>
         </pc:spChg>
       </pc:sldChg>
@@ -5075,7 +5098,12 @@
             <p:ph idx="1"/>
           </p:nvPr>
         </p:nvSpPr>
-        <p:spPr/>
+        <p:spPr>
+          <a:xfrm>
+            <a:off x="963706" y="1852519"/>
+            <a:ext cx="10515600" cy="4351338"/>
+          </a:xfrm>
+        </p:spPr>
         <p:txBody>
           <a:bodyPr>
             <a:normAutofit fontScale="92500" lnSpcReduction="20000"/>
